--- a/docs/presentation_management.pptx
+++ b/docs/presentation_management.pptx
@@ -3355,7 +3355,7 @@
                   <a:srgbClr val="555555"/>
                 </a:solidFill>
               </a:rPr>
-              <a:t>Version 0.9.0  ·  Mai 2026</a:t>
+              <a:t>Version 0.14.3  ·  Mai 2026</a:t>
             </a:r>
           </a:p>
         </p:txBody>
@@ -6004,7 +6004,7 @@
                   <a:srgbClr val="FFFFFF"/>
                 </a:solidFill>
               </a:rPr>
-              <a:t>Heute verfügbar — Version 0.9.0</a:t>
+              <a:t>Heute verfügbar — Version 0.14.3</a:t>
             </a:r>
           </a:p>
         </p:txBody>
@@ -6483,7 +6483,7 @@
             <a:avLst/>
           </a:prstGeom>
           <a:solidFill>
-            <a:srgbClr val="E74C3C"/>
+            <a:srgbClr val="E67E22"/>
           </a:solidFill>
           <a:ln>
             <a:noFill/>
@@ -6540,7 +6540,7 @@
                   <a:srgbClr val="FFFFFF"/>
                 </a:solidFill>
               </a:rPr>
-              <a:t>ALPHA</a:t>
+              <a:t>BETA</a:t>
             </a:r>
           </a:p>
         </p:txBody>
@@ -6574,7 +6574,7 @@
                   <a:srgbClr val="2C3E50"/>
                 </a:solidFill>
               </a:rPr>
-              <a:t>Helper</a:t>
+              <a:t>Testdata Generator</a:t>
             </a:r>
           </a:p>
         </p:txBody>
@@ -6608,7 +6608,7 @@
                   <a:srgbClr val="555555"/>
                 </a:solidFill>
               </a:rPr>
-              <a:t>Mehrere JSON-Exporte zusammenführen</a:t>
+              <a:t>Synthetische Testdaten erzeugen</a:t>
             </a:r>
           </a:p>
         </p:txBody>
@@ -6764,7 +6764,7 @@
                   <a:srgbClr val="2C3E50"/>
                 </a:solidFill>
               </a:rPr>
-              <a:t>Testdata Generator</a:t>
+              <a:t>Helper</a:t>
             </a:r>
           </a:p>
         </p:txBody>
@@ -6798,7 +6798,7 @@
                   <a:srgbClr val="555555"/>
                 </a:solidFill>
               </a:rPr>
-              <a:t>Synthetische Testdaten erzeugen</a:t>
+              <a:t>Mehrere JSON-Exporte zusammenführen</a:t>
             </a:r>
           </a:p>
         </p:txBody>
@@ -7218,7 +7218,7 @@
                   <a:srgbClr val="2C3E50"/>
                 </a:solidFill>
               </a:rPr>
-              <a:t>● Helper  [ALPHA]</a:t>
+              <a:t>● Testdata Generator  [BETA]</a:t>
             </a:r>
           </a:p>
           <a:p>
@@ -7233,7 +7233,7 @@
                   <a:srgbClr val="2C3E50"/>
                 </a:solidFill>
               </a:rPr>
-              <a:t>● Testdata Generator  [ALPHA]</a:t>
+              <a:t>● Helper  [ALPHA]</a:t>
             </a:r>
           </a:p>
         </p:txBody>
